--- a/assets/pptx/catalog-14.pptx
+++ b/assets/pptx/catalog-14.pptx
@@ -3334,7 +3334,7 @@
                 <a:ea typeface="Ebrima"/>
                 <a:cs typeface="Ebrima"/>
               </a:rPr>
-              <a:t>ሞት መሻገሪያዬ (2x)</a:t>
+              <a:t>ሞት መሻገሪያዬ 2x</a:t>
             </a:r>
           </a:p>
         </p:txBody>
@@ -3455,7 +3455,7 @@
                 <a:ea typeface="Ebrima"/>
                 <a:cs typeface="Ebrima"/>
               </a:rPr>
-              <a:t>በዘለዓለም ቤት በደስታዬ ቤት (2x)</a:t>
+              <a:t>በዘለዓለም ቤት በደስታዬ ቤት 2x</a:t>
             </a:r>
           </a:p>
         </p:txBody>
@@ -3576,7 +3576,7 @@
                 <a:ea typeface="Ebrima"/>
                 <a:cs typeface="Ebrima"/>
               </a:rPr>
-              <a:t>ከሞት ወዲያ ከእርሱ ጋር እንደምሆን ነው (2x)</a:t>
+              <a:t>ከሞት ወዲያ ከእርሱ ጋር እንደምሆን ነው 2x</a:t>
             </a:r>
           </a:p>
         </p:txBody>
@@ -3733,7 +3733,7 @@
                 <a:ea typeface="Ebrima"/>
                 <a:cs typeface="Ebrima"/>
               </a:rPr>
-              <a:t>ሞት ለእኔ ክብሬ ነው (2x)</a:t>
+              <a:t>ሞት ለእኔ ክብሬ ነው 2x</a:t>
             </a:r>
           </a:p>
         </p:txBody>
